--- a/references/Manuals/Electrical Prober Overview.pptx
+++ b/references/Manuals/Electrical Prober Overview.pptx
@@ -3254,7 +3254,7 @@
                 </a:solidFill>
                 <a:latin typeface="Segoe UI"/>
               </a:rPr>
-              <a:t>Rebuilding wafer-probe test automation from the ground up</a:t>
+              <a:t>A modern foundation for wafer-probe testing</a:t>
             </a:r>
           </a:p>
         </p:txBody>
@@ -3324,11 +3324,59 @@
                 </a:solidFill>
                 <a:latin typeface="Segoe UI"/>
               </a:rPr>
-              <a:t>Internal engineering overview</a:t>
-            </a:r>
-          </a:p>
-        </p:txBody>
-      </p:sp>
+              <a:t>Internal Overview</a:t>
+            </a:r>
+          </a:p>
+        </p:txBody>
+      </p:sp>
+      <p:pic>
+        <p:nvPicPr>
+          <p:cNvPr id="8" name="Logo Atomica" descr="image.png"/>
+          <p:cNvPicPr>
+            <a:picLocks noChangeAspect="1"/>
+          </p:cNvPicPr>
+          <p:nvPr/>
+        </p:nvPicPr>
+        <p:blipFill>
+          <a:blip r:embed="rId2"/>
+          <a:stretch>
+            <a:fillRect/>
+          </a:stretch>
+        </p:blipFill>
+        <p:spPr>
+          <a:xfrm>
+            <a:off x="9573706" y="365760"/>
+            <a:ext cx="1385455" cy="365760"/>
+          </a:xfrm>
+          <a:prstGeom prst="rect">
+            <a:avLst/>
+          </a:prstGeom>
+        </p:spPr>
+      </p:pic>
+      <p:pic>
+        <p:nvPicPr>
+          <p:cNvPr id="9" name="Logo OTTO" descr="image.png"/>
+          <p:cNvPicPr>
+            <a:picLocks noChangeAspect="1"/>
+          </p:cNvPicPr>
+          <p:nvPr/>
+        </p:nvPicPr>
+        <p:blipFill>
+          <a:blip r:embed="rId3"/>
+          <a:stretch>
+            <a:fillRect/>
+          </a:stretch>
+        </p:blipFill>
+        <p:spPr>
+          <a:xfrm>
+            <a:off x="11142040" y="365760"/>
+            <a:ext cx="683895" cy="365760"/>
+          </a:xfrm>
+          <a:prstGeom prst="rect">
+            <a:avLst/>
+          </a:prstGeom>
+        </p:spPr>
+      </p:pic>
     </p:spTree>
   </p:cSld>
   <p:clrMapOvr>
@@ -3544,7 +3592,7 @@
                 </a:solidFill>
                 <a:latin typeface="Segoe UI"/>
               </a:rPr>
-              <a:t>Running Many Wafers Without a Person Watching</a:t>
+              <a:t>Many Wafers, One Operator</a:t>
             </a:r>
           </a:p>
         </p:txBody>
@@ -3583,7 +3631,7 @@
                 </a:solidFill>
                 <a:latin typeface="Segoe UI"/>
               </a:rPr>
-              <a:t>Production testing rarely means one wafer at a time. A cassette holds a whole stack of wafers, and the software can load, test, unload, and move to the next one entirely on its own.</a:t>
+              <a:t>A full cassette of wafers can be loaded, tested, and advanced automatically, one after another.</a:t>
             </a:r>
           </a:p>
           <a:p>
@@ -3615,7 +3663,7 @@
                 </a:solidFill>
                 <a:latin typeface="Segoe UI"/>
               </a:rPr>
-              <a:t>A configurable yield threshold decides whether to keep going automatically or pause for a person to look - letting one operator supervise many wafers instead of babysitting each one.</a:t>
+              <a:t>A yield threshold decides when to keep going and when to pause for a person — so one operator can oversee many wafers at once.</a:t>
             </a:r>
           </a:p>
         </p:txBody>
@@ -3718,7 +3766,7 @@
                 </a:solidFill>
                 <a:latin typeface="Segoe UI"/>
               </a:rPr>
-              <a:t>Cassette automation - unattended, multi-wafer runs</a:t>
+              <a:t>Unattended, multi-wafer runs</a:t>
             </a:r>
           </a:p>
         </p:txBody>
@@ -3758,6 +3806,54 @@
           </a:p>
         </p:txBody>
       </p:sp>
+      <p:pic>
+        <p:nvPicPr>
+          <p:cNvPr id="12" name="Logo Atomica" descr="atomica_transparent.png"/>
+          <p:cNvPicPr>
+            <a:picLocks noChangeAspect="1"/>
+          </p:cNvPicPr>
+          <p:nvPr/>
+        </p:nvPicPr>
+        <p:blipFill>
+          <a:blip r:embed="rId3"/>
+          <a:stretch>
+            <a:fillRect/>
+          </a:stretch>
+        </p:blipFill>
+        <p:spPr>
+          <a:xfrm>
+            <a:off x="9573706" y="342900"/>
+            <a:ext cx="1385455" cy="365760"/>
+          </a:xfrm>
+          <a:prstGeom prst="rect">
+            <a:avLst/>
+          </a:prstGeom>
+        </p:spPr>
+      </p:pic>
+      <p:pic>
+        <p:nvPicPr>
+          <p:cNvPr id="13" name="Logo OTTO" descr="otto_transparent.png"/>
+          <p:cNvPicPr>
+            <a:picLocks noChangeAspect="1"/>
+          </p:cNvPicPr>
+          <p:nvPr/>
+        </p:nvPicPr>
+        <p:blipFill>
+          <a:blip r:embed="rId4"/>
+          <a:stretch>
+            <a:fillRect/>
+          </a:stretch>
+        </p:blipFill>
+        <p:spPr>
+          <a:xfrm>
+            <a:off x="11142040" y="342900"/>
+            <a:ext cx="683895" cy="365760"/>
+          </a:xfrm>
+          <a:prstGeom prst="rect">
+            <a:avLst/>
+          </a:prstGeom>
+        </p:spPr>
+      </p:pic>
     </p:spTree>
   </p:cSld>
   <p:clrMapOvr>
@@ -4012,7 +4108,7 @@
                 </a:solidFill>
                 <a:latin typeface="Segoe UI"/>
               </a:rPr>
-              <a:t>Every product/test program gets its own self-contained folder: its probe cards, its recipes, its wafer maps, its default settings - all in one place.</a:t>
+              <a:t>Every product gets one self-contained folder — its probe cards, recipes, wafer maps, and settings, all together.</a:t>
             </a:r>
           </a:p>
           <a:p>
@@ -4044,7 +4140,7 @@
                 </a:solidFill>
                 <a:latin typeface="Segoe UI"/>
               </a:rPr>
-              <a:t>That folder can be copied, backed up, or handed to another bench wholesale, and the software shows exactly what it found (and what's missing) at a glance instead of requiring a manual file hunt.</a:t>
+              <a:t>That folder can be copied, backed up, or handed to another bench directly — with nothing to hunt for.</a:t>
             </a:r>
           </a:p>
         </p:txBody>
@@ -4147,7 +4243,7 @@
                 </a:solidFill>
                 <a:latin typeface="Segoe UI"/>
               </a:rPr>
-              <a:t>Everything for one product, organized and visible in one place</a:t>
+              <a:t>Everything for one product, organized in one place</a:t>
             </a:r>
           </a:p>
         </p:txBody>
@@ -4187,6 +4283,54 @@
           </a:p>
         </p:txBody>
       </p:sp>
+      <p:pic>
+        <p:nvPicPr>
+          <p:cNvPr id="12" name="Logo Atomica" descr="atomica_transparent.png"/>
+          <p:cNvPicPr>
+            <a:picLocks noChangeAspect="1"/>
+          </p:cNvPicPr>
+          <p:nvPr/>
+        </p:nvPicPr>
+        <p:blipFill>
+          <a:blip r:embed="rId3"/>
+          <a:stretch>
+            <a:fillRect/>
+          </a:stretch>
+        </p:blipFill>
+        <p:spPr>
+          <a:xfrm>
+            <a:off x="9573706" y="342900"/>
+            <a:ext cx="1385455" cy="365760"/>
+          </a:xfrm>
+          <a:prstGeom prst="rect">
+            <a:avLst/>
+          </a:prstGeom>
+        </p:spPr>
+      </p:pic>
+      <p:pic>
+        <p:nvPicPr>
+          <p:cNvPr id="13" name="Logo OTTO" descr="otto_transparent.png"/>
+          <p:cNvPicPr>
+            <a:picLocks noChangeAspect="1"/>
+          </p:cNvPicPr>
+          <p:nvPr/>
+        </p:nvPicPr>
+        <p:blipFill>
+          <a:blip r:embed="rId4"/>
+          <a:stretch>
+            <a:fillRect/>
+          </a:stretch>
+        </p:blipFill>
+        <p:spPr>
+          <a:xfrm>
+            <a:off x="11142040" y="342900"/>
+            <a:ext cx="683895" cy="365760"/>
+          </a:xfrm>
+          <a:prstGeom prst="rect">
+            <a:avLst/>
+          </a:prstGeom>
+        </p:spPr>
+      </p:pic>
     </p:spTree>
   </p:cSld>
   <p:clrMapOvr>
@@ -4402,7 +4546,7 @@
                 </a:solidFill>
                 <a:latin typeface="Segoe UI"/>
               </a:rPr>
-              <a:t>What the Rewrite Actually Bought Us</a:t>
+              <a:t>What We Gained</a:t>
             </a:r>
           </a:p>
         </p:txBody>
@@ -4415,8 +4559,8 @@
         </p:nvSpPr>
         <p:spPr>
           <a:xfrm>
-            <a:off x="548640" y="1417320"/>
-            <a:ext cx="11064240" cy="4480560"/>
+            <a:off x="548640" y="1280160"/>
+            <a:ext cx="5486400" cy="4206240"/>
           </a:xfrm>
           <a:prstGeom prst="rect">
             <a:avLst/>
@@ -4441,7 +4585,7 @@
                 </a:solidFill>
                 <a:latin typeface="Segoe UI"/>
               </a:rPr>
-              <a:t>▸  Retired an unsupported operating system</a:t>
+              <a:t>▸  A safer, supported foundation</a:t>
             </a:r>
             <a:r>
               <a:rPr sz="1650" b="0">
@@ -4450,7 +4594,7 @@
                 </a:solidFill>
                 <a:latin typeface="Segoe UI"/>
               </a:rPr>
-              <a:t>  —  the Electroglas side no longer depends on Windows XP - one less unpatched machine on the network.</a:t>
+              <a:t>  —  no more running on an unsupported operating system.</a:t>
             </a:r>
           </a:p>
           <a:p>
@@ -4466,7 +4610,7 @@
                 </a:solidFill>
                 <a:latin typeface="Segoe UI"/>
               </a:rPr>
-              <a:t>▸  Turned a hardcoded system into a configurable one</a:t>
+              <a:t>▸  A flexible, configurable system</a:t>
             </a:r>
             <a:r>
               <a:rPr sz="1650" b="0">
@@ -4475,7 +4619,7 @@
                 </a:solidFill>
                 <a:latin typeface="Segoe UI"/>
               </a:rPr>
-              <a:t>  —  building a new product is now a matter of filling in a probe card, a wafer map, and a recipe on screen, not writing new software.</a:t>
+              <a:t>  —  new products are a setup task, not a coding project.</a:t>
             </a:r>
           </a:p>
           <a:p>
@@ -4491,7 +4635,7 @@
                 </a:solidFill>
                 <a:latin typeface="Segoe UI"/>
               </a:rPr>
-              <a:t>▸  No more per-seat LabVIEW licensing</a:t>
+              <a:t>▸  Lower cost</a:t>
             </a:r>
             <a:r>
               <a:rPr sz="1650" b="0">
@@ -4500,7 +4644,7 @@
                 </a:solidFill>
                 <a:latin typeface="Segoe UI"/>
               </a:rPr>
-              <a:t>  —  the whole application runs on free, open tools.</a:t>
+              <a:t>  —  no more per-seat software licensing.</a:t>
             </a:r>
           </a:p>
           <a:p>
@@ -4516,7 +4660,7 @@
                 </a:solidFill>
                 <a:latin typeface="Segoe UI"/>
               </a:rPr>
-              <a:t>▸  A real, readable codebase</a:t>
+              <a:t>▸  Easier to maintain and hand off</a:t>
             </a:r>
             <a:r>
               <a:rPr sz="1650" b="0">
@@ -4525,32 +4669,7 @@
                 </a:solidFill>
                 <a:latin typeface="Segoe UI"/>
               </a:rPr>
-              <a:t>  —  changes are tracked, reviewed, and reversible - not buried in a proprietary block-diagram file.</a:t>
-            </a:r>
-          </a:p>
-          <a:p>
-            <a:pPr>
-              <a:spcAft>
-                <a:spcPts val="1300"/>
-              </a:spcAft>
-            </a:pPr>
-            <a:r>
-              <a:rPr sz="1650" b="1">
-                <a:solidFill>
-                  <a:srgbClr val="111827"/>
-                </a:solidFill>
-                <a:latin typeface="Segoe UI"/>
-              </a:rPr>
-              <a:t>▸  Easier to hand off</a:t>
-            </a:r>
-            <a:r>
-              <a:rPr sz="1650" b="0">
-                <a:solidFill>
-                  <a:srgbClr val="4B5563"/>
-                </a:solidFill>
-                <a:latin typeface="Segoe UI"/>
-              </a:rPr>
-              <a:t>  —  Python is a skill far more engineers already have than a niche graphical language.</a:t>
+              <a:t>  —  a real, reviewable codebase in a language far more engineers already know.</a:t>
             </a:r>
           </a:p>
         </p:txBody>
@@ -4590,6 +4709,142 @@
           </a:p>
         </p:txBody>
       </p:sp>
+      <p:sp>
+        <p:nvSpPr>
+          <p:cNvPr id="9" name="Placeholder Frame"/>
+          <p:cNvSpPr/>
+          <p:nvPr/>
+        </p:nvSpPr>
+        <p:spPr>
+          <a:xfrm>
+            <a:off x="6134100" y="1562100"/>
+            <a:ext cx="5654040" cy="3074289"/>
+          </a:xfrm>
+          <a:prstGeom prst="rect">
+            <a:avLst/>
+          </a:prstGeom>
+          <a:solidFill>
+            <a:srgbClr val="D1D5DB"/>
+          </a:solidFill>
+          <a:ln>
+            <a:noFill/>
+          </a:ln>
+          <a:effectLst/>
+        </p:spPr>
+        <p:style>
+          <a:lnRef idx="1">
+            <a:schemeClr val="accent1"/>
+          </a:lnRef>
+          <a:fillRef idx="3">
+            <a:schemeClr val="accent1"/>
+          </a:fillRef>
+          <a:effectRef idx="2">
+            <a:schemeClr val="accent1"/>
+          </a:effectRef>
+          <a:fontRef idx="minor">
+            <a:schemeClr val="lt1"/>
+          </a:fontRef>
+        </p:style>
+        <p:txBody>
+          <a:bodyPr rtlCol="0" anchor="ctr" wrap="square"/>
+          <a:lstStyle/>
+          <a:p>
+            <a:pPr algn="ctr"/>
+            <a:r>
+              <a:rPr b="1" sz="2000">
+                <a:solidFill>
+                  <a:srgbClr val="9CA3AF"/>
+                </a:solidFill>
+                <a:latin typeface="Segoe UI"/>
+              </a:rPr>
+              <a:t>ADD IMAGE</a:t>
+            </a:r>
+          </a:p>
+        </p:txBody>
+      </p:sp>
+      <p:sp>
+        <p:nvSpPr>
+          <p:cNvPr id="10" name="Placeholder Caption"/>
+          <p:cNvSpPr txBox="1"/>
+          <p:nvPr/>
+        </p:nvSpPr>
+        <p:spPr>
+          <a:xfrm>
+            <a:off x="6172200" y="4674489"/>
+            <a:ext cx="5577840" cy="320040"/>
+          </a:xfrm>
+          <a:prstGeom prst="rect">
+            <a:avLst/>
+          </a:prstGeom>
+          <a:noFill/>
+        </p:spPr>
+        <p:txBody>
+          <a:bodyPr wrap="square">
+            <a:spAutoFit/>
+          </a:bodyPr>
+          <a:lstStyle/>
+          <a:p>
+            <a:pPr algn="ctr"/>
+            <a:r>
+              <a:rPr sz="1300" i="1">
+                <a:solidFill>
+                  <a:srgbClr val="4B5563"/>
+                </a:solidFill>
+                <a:latin typeface="Segoe UI"/>
+              </a:rPr>
+              <a:t>Suggested: before-and-after comparison</a:t>
+            </a:r>
+          </a:p>
+        </p:txBody>
+      </p:sp>
+      <p:pic>
+        <p:nvPicPr>
+          <p:cNvPr id="11" name="Logo Atomica" descr="atomica_transparent.png"/>
+          <p:cNvPicPr>
+            <a:picLocks noChangeAspect="1"/>
+          </p:cNvPicPr>
+          <p:nvPr/>
+        </p:nvPicPr>
+        <p:blipFill>
+          <a:blip r:embed="rId2"/>
+          <a:stretch>
+            <a:fillRect/>
+          </a:stretch>
+        </p:blipFill>
+        <p:spPr>
+          <a:xfrm>
+            <a:off x="9573706" y="342900"/>
+            <a:ext cx="1385455" cy="365760"/>
+          </a:xfrm>
+          <a:prstGeom prst="rect">
+            <a:avLst/>
+          </a:prstGeom>
+        </p:spPr>
+      </p:pic>
+      <p:pic>
+        <p:nvPicPr>
+          <p:cNvPr id="12" name="Logo OTTO" descr="otto_transparent.png"/>
+          <p:cNvPicPr>
+            <a:picLocks noChangeAspect="1"/>
+          </p:cNvPicPr>
+          <p:nvPr/>
+        </p:nvPicPr>
+        <p:blipFill>
+          <a:blip r:embed="rId3"/>
+          <a:stretch>
+            <a:fillRect/>
+          </a:stretch>
+        </p:blipFill>
+        <p:spPr>
+          <a:xfrm>
+            <a:off x="11142040" y="342900"/>
+            <a:ext cx="683895" cy="365760"/>
+          </a:xfrm>
+          <a:prstGeom prst="rect">
+            <a:avLst/>
+          </a:prstGeom>
+        </p:spPr>
+      </p:pic>
     </p:spTree>
   </p:cSld>
   <p:clrMapOvr>
@@ -4818,8 +5073,8 @@
         </p:nvSpPr>
         <p:spPr>
           <a:xfrm>
-            <a:off x="548640" y="1371600"/>
-            <a:ext cx="11064240" cy="640080"/>
+            <a:off x="548640" y="1280160"/>
+            <a:ext cx="5486400" cy="640080"/>
           </a:xfrm>
           <a:prstGeom prst="rect">
             <a:avLst/>
@@ -4840,7 +5095,7 @@
                 </a:solidFill>
                 <a:latin typeface="Segoe UI"/>
               </a:rPr>
-              <a:t>Beyond the wafer map itself, the rest of the architecture - GPIB-driven instruments and step-by-step recipes - fits any bench-style automated test.</a:t>
+              <a:t>The same foundation — connected instruments plus step-by-step recipes — fits far more than wafer probing.</a:t>
             </a:r>
           </a:p>
         </p:txBody>
@@ -4853,8 +5108,8 @@
         </p:nvSpPr>
         <p:spPr>
           <a:xfrm>
-            <a:off x="548640" y="2194560"/>
-            <a:ext cx="11064240" cy="3840480"/>
+            <a:off x="548640" y="2011680"/>
+            <a:ext cx="5486400" cy="3474720"/>
           </a:xfrm>
           <a:prstGeom prst="rect">
             <a:avLst/>
@@ -4879,7 +5134,7 @@
                 </a:solidFill>
                 <a:latin typeface="Segoe UI"/>
               </a:rPr>
-              <a:t>▸  Other wafer probers or prober brands</a:t>
+              <a:t>▸  Other wafer probers</a:t>
             </a:r>
             <a:r>
               <a:rPr sz="1600" b="0">
@@ -4888,7 +5143,7 @@
                 </a:solidFill>
                 <a:latin typeface="Segoe UI"/>
               </a:rPr>
-              <a:t>  —  any station that steps across a grid of positions running electrical tests is the same problem with different geometry - the wafer map engine carries over directly.</a:t>
+              <a:t>  —  any brand, any bench.</a:t>
             </a:r>
           </a:p>
           <a:p>
@@ -4904,7 +5159,7 @@
                 </a:solidFill>
                 <a:latin typeface="Segoe UI"/>
               </a:rPr>
-              <a:t>▸  Burn-in and reliability test racks</a:t>
+              <a:t>▸  Burn-in and reliability racks</a:t>
             </a:r>
             <a:r>
               <a:rPr sz="1600" b="0">
@@ -4913,7 +5168,7 @@
                 </a:solidFill>
                 <a:latin typeface="Segoe UI"/>
               </a:rPr>
-              <a:t>  —  many parts, each stepped through a fixed sequence of stress/measure steps over time.</a:t>
+              <a:t>  —  many parts, stepped through the same test sequence.</a:t>
             </a:r>
           </a:p>
           <a:p>
@@ -4929,7 +5184,7 @@
                 </a:solidFill>
                 <a:latin typeface="Segoe UI"/>
               </a:rPr>
-              <a:t>▸  PCB / module functional test benches</a:t>
+              <a:t>▸  Functional test benches</a:t>
             </a:r>
             <a:r>
               <a:rPr sz="1600" b="0">
@@ -4938,7 +5193,7 @@
                 </a:solidFill>
                 <a:latin typeface="Segoe UI"/>
               </a:rPr>
-              <a:t>  —  swap the wafer map for a fixture of board positions; everything else - instrument driving, recipes, pass/fail, export - carries over.</a:t>
+              <a:t>  —  circuit boards and modules, not just wafers.</a:t>
             </a:r>
           </a:p>
           <a:p>
@@ -4954,7 +5209,7 @@
                 </a:solidFill>
                 <a:latin typeface="Segoe UI"/>
               </a:rPr>
-              <a:t>▸  RF and optical test setups</a:t>
+              <a:t>▸  Any process still stuck on old, unsupported tools</a:t>
             </a:r>
             <a:r>
               <a:rPr sz="1600" b="0">
@@ -4963,32 +5218,7 @@
                 </a:solidFill>
                 <a:latin typeface="Segoe UI"/>
               </a:rPr>
-              <a:t>  —  same GPIB/instrument-driver backbone, different measurement types.</a:t>
-            </a:r>
-          </a:p>
-          <a:p>
-            <a:pPr>
-              <a:spcAft>
-                <a:spcPts val="1300"/>
-              </a:spcAft>
-            </a:pPr>
-            <a:r>
-              <a:rPr sz="1600" b="1">
-                <a:solidFill>
-                  <a:srgbClr val="111827"/>
-                </a:solidFill>
-                <a:latin typeface="Segoe UI"/>
-              </a:rPr>
-              <a:t>▸  Any lab process still running on old, unsupported machines or one engineer's hardcoded program</a:t>
-            </a:r>
-            <a:r>
-              <a:rPr sz="1600" b="0">
-                <a:solidFill>
-                  <a:srgbClr val="4B5563"/>
-                </a:solidFill>
-                <a:latin typeface="Segoe UI"/>
-              </a:rPr>
-              <a:t>  —  is a candidate for the same kind of rebuild.</a:t>
+              <a:t>  —  a strong candidate for the same rebuild.</a:t>
             </a:r>
           </a:p>
         </p:txBody>
@@ -5028,6 +5258,142 @@
           </a:p>
         </p:txBody>
       </p:sp>
+      <p:sp>
+        <p:nvSpPr>
+          <p:cNvPr id="10" name="Placeholder Frame"/>
+          <p:cNvSpPr/>
+          <p:nvPr/>
+        </p:nvSpPr>
+        <p:spPr>
+          <a:xfrm>
+            <a:off x="6134100" y="1562100"/>
+            <a:ext cx="5654040" cy="3074289"/>
+          </a:xfrm>
+          <a:prstGeom prst="rect">
+            <a:avLst/>
+          </a:prstGeom>
+          <a:solidFill>
+            <a:srgbClr val="D1D5DB"/>
+          </a:solidFill>
+          <a:ln>
+            <a:noFill/>
+          </a:ln>
+          <a:effectLst/>
+        </p:spPr>
+        <p:style>
+          <a:lnRef idx="1">
+            <a:schemeClr val="accent1"/>
+          </a:lnRef>
+          <a:fillRef idx="3">
+            <a:schemeClr val="accent1"/>
+          </a:fillRef>
+          <a:effectRef idx="2">
+            <a:schemeClr val="accent1"/>
+          </a:effectRef>
+          <a:fontRef idx="minor">
+            <a:schemeClr val="lt1"/>
+          </a:fontRef>
+        </p:style>
+        <p:txBody>
+          <a:bodyPr rtlCol="0" anchor="ctr" wrap="square"/>
+          <a:lstStyle/>
+          <a:p>
+            <a:pPr algn="ctr"/>
+            <a:r>
+              <a:rPr b="1" sz="2000">
+                <a:solidFill>
+                  <a:srgbClr val="9CA3AF"/>
+                </a:solidFill>
+                <a:latin typeface="Segoe UI"/>
+              </a:rPr>
+              <a:t>ADD IMAGE</a:t>
+            </a:r>
+          </a:p>
+        </p:txBody>
+      </p:sp>
+      <p:sp>
+        <p:nvSpPr>
+          <p:cNvPr id="11" name="Placeholder Caption"/>
+          <p:cNvSpPr txBox="1"/>
+          <p:nvPr/>
+        </p:nvSpPr>
+        <p:spPr>
+          <a:xfrm>
+            <a:off x="6172200" y="4674489"/>
+            <a:ext cx="5577840" cy="320040"/>
+          </a:xfrm>
+          <a:prstGeom prst="rect">
+            <a:avLst/>
+          </a:prstGeom>
+          <a:noFill/>
+        </p:spPr>
+        <p:txBody>
+          <a:bodyPr wrap="square">
+            <a:spAutoFit/>
+          </a:bodyPr>
+          <a:lstStyle/>
+          <a:p>
+            <a:pPr algn="ctr"/>
+            <a:r>
+              <a:rPr sz="1300" i="1">
+                <a:solidFill>
+                  <a:srgbClr val="4B5563"/>
+                </a:solidFill>
+                <a:latin typeface="Segoe UI"/>
+              </a:rPr>
+              <a:t>Suggested: other applications this could support</a:t>
+            </a:r>
+          </a:p>
+        </p:txBody>
+      </p:sp>
+      <p:pic>
+        <p:nvPicPr>
+          <p:cNvPr id="12" name="Logo Atomica" descr="atomica_transparent.png"/>
+          <p:cNvPicPr>
+            <a:picLocks noChangeAspect="1"/>
+          </p:cNvPicPr>
+          <p:nvPr/>
+        </p:nvPicPr>
+        <p:blipFill>
+          <a:blip r:embed="rId2"/>
+          <a:stretch>
+            <a:fillRect/>
+          </a:stretch>
+        </p:blipFill>
+        <p:spPr>
+          <a:xfrm>
+            <a:off x="9573706" y="342900"/>
+            <a:ext cx="1385455" cy="365760"/>
+          </a:xfrm>
+          <a:prstGeom prst="rect">
+            <a:avLst/>
+          </a:prstGeom>
+        </p:spPr>
+      </p:pic>
+      <p:pic>
+        <p:nvPicPr>
+          <p:cNvPr id="13" name="Logo OTTO" descr="otto_transparent.png"/>
+          <p:cNvPicPr>
+            <a:picLocks noChangeAspect="1"/>
+          </p:cNvPicPr>
+          <p:nvPr/>
+        </p:nvPicPr>
+        <p:blipFill>
+          <a:blip r:embed="rId3"/>
+          <a:stretch>
+            <a:fillRect/>
+          </a:stretch>
+        </p:blipFill>
+        <p:spPr>
+          <a:xfrm>
+            <a:off x="11142040" y="342900"/>
+            <a:ext cx="683895" cy="365760"/>
+          </a:xfrm>
+          <a:prstGeom prst="rect">
+            <a:avLst/>
+          </a:prstGeom>
+        </p:spPr>
+      </p:pic>
     </p:spTree>
   </p:cSld>
   <p:clrMapOvr>
@@ -5239,6 +5605,54 @@
           </a:p>
         </p:txBody>
       </p:sp>
+      <p:pic>
+        <p:nvPicPr>
+          <p:cNvPr id="7" name="Logo Atomica" descr="image.png"/>
+          <p:cNvPicPr>
+            <a:picLocks noChangeAspect="1"/>
+          </p:cNvPicPr>
+          <p:nvPr/>
+        </p:nvPicPr>
+        <p:blipFill>
+          <a:blip r:embed="rId2"/>
+          <a:stretch>
+            <a:fillRect/>
+          </a:stretch>
+        </p:blipFill>
+        <p:spPr>
+          <a:xfrm>
+            <a:off x="9573706" y="365760"/>
+            <a:ext cx="1385455" cy="365760"/>
+          </a:xfrm>
+          <a:prstGeom prst="rect">
+            <a:avLst/>
+          </a:prstGeom>
+        </p:spPr>
+      </p:pic>
+      <p:pic>
+        <p:nvPicPr>
+          <p:cNvPr id="8" name="Logo OTTO" descr="image.png"/>
+          <p:cNvPicPr>
+            <a:picLocks noChangeAspect="1"/>
+          </p:cNvPicPr>
+          <p:nvPr/>
+        </p:nvPicPr>
+        <p:blipFill>
+          <a:blip r:embed="rId3"/>
+          <a:stretch>
+            <a:fillRect/>
+          </a:stretch>
+        </p:blipFill>
+        <p:spPr>
+          <a:xfrm>
+            <a:off x="11142040" y="365760"/>
+            <a:ext cx="683895" cy="365760"/>
+          </a:xfrm>
+          <a:prstGeom prst="rect">
+            <a:avLst/>
+          </a:prstGeom>
+        </p:spPr>
+      </p:pic>
     </p:spTree>
   </p:cSld>
   <p:clrMapOvr>
@@ -5467,8 +5881,8 @@
         </p:nvSpPr>
         <p:spPr>
           <a:xfrm>
-            <a:off x="548640" y="1417320"/>
-            <a:ext cx="11064240" cy="4389120"/>
+            <a:off x="548640" y="1280160"/>
+            <a:ext cx="5486400" cy="4206240"/>
           </a:xfrm>
           <a:prstGeom prst="rect">
             <a:avLst/>
@@ -5493,7 +5907,7 @@
                 </a:solidFill>
                 <a:latin typeface="Segoe UI"/>
               </a:rPr>
-              <a:t>▸  The old system ran on LabVIEW</a:t>
+              <a:t>▸  Our old system was costly and hard to maintain</a:t>
             </a:r>
             <a:r>
               <a:rPr sz="1700" b="0">
@@ -5502,7 +5916,7 @@
                 </a:solidFill>
                 <a:latin typeface="Segoe UI"/>
               </a:rPr>
-              <a:t>  —  a graphical programming tool that has powered our wafer probers for years, but is expensive to license, slow to change, and increasingly hard to find engineers who know it well.</a:t>
+              <a:t>  —  it depended on aging, specialized software and a shrinking pool of engineers who knew it.</a:t>
             </a:r>
           </a:p>
           <a:p>
@@ -5518,7 +5932,7 @@
                 </a:solidFill>
                 <a:latin typeface="Segoe UI"/>
               </a:rPr>
-              <a:t>▸  It was built assumption by assumption for the exact hardware in front of it</a:t>
+              <a:t>▸  Every new product meant rewriting the program itself</a:t>
             </a:r>
             <a:r>
               <a:rPr sz="1700" b="0">
@@ -5527,7 +5941,7 @@
                 </a:solidFill>
                 <a:latin typeface="Segoe UI"/>
               </a:rPr>
-              <a:t>  —  adding a new product, probe card, or instrument usually meant rewiring the underlying program itself, not just changing a setting.</a:t>
+              <a:t>  —  not just changing a setting.</a:t>
             </a:r>
           </a:p>
           <a:p>
@@ -5543,7 +5957,7 @@
                 </a:solidFill>
                 <a:latin typeface="Segoe UI"/>
               </a:rPr>
-              <a:t>▸  The goal: rebuild the same capability in Python</a:t>
+              <a:t>▸  We rebuilt it on modern, open foundations</a:t>
             </a:r>
             <a:r>
               <a:rPr sz="1700" b="0">
@@ -5552,32 +5966,7 @@
                 </a:solidFill>
                 <a:latin typeface="Segoe UI"/>
               </a:rPr>
-              <a:t>  —  a free, modern, widely-known language, with a real codebase that can be version-controlled, tested, and handed off to the next engineer without a specialty tool.</a:t>
-            </a:r>
-          </a:p>
-          <a:p>
-            <a:pPr>
-              <a:spcAft>
-                <a:spcPts val="1500"/>
-              </a:spcAft>
-            </a:pPr>
-            <a:r>
-              <a:rPr sz="1700" b="1">
-                <a:solidFill>
-                  <a:srgbClr val="111827"/>
-                </a:solidFill>
-                <a:latin typeface="Segoe UI"/>
-              </a:rPr>
-              <a:t>▸  Nothing about how the wafer probers or instruments physically work changed</a:t>
-            </a:r>
-            <a:r>
-              <a:rPr sz="1700" b="0">
-                <a:solidFill>
-                  <a:srgbClr val="4B5563"/>
-                </a:solidFill>
-                <a:latin typeface="Segoe UI"/>
-              </a:rPr>
-              <a:t>  —  the new software just talks to the same hardware in a cleaner, more flexible way.</a:t>
+              <a:t>  —  easier to maintain, extend, and hand off for years to come.</a:t>
             </a:r>
           </a:p>
         </p:txBody>
@@ -5617,6 +6006,142 @@
           </a:p>
         </p:txBody>
       </p:sp>
+      <p:sp>
+        <p:nvSpPr>
+          <p:cNvPr id="9" name="Placeholder Frame"/>
+          <p:cNvSpPr/>
+          <p:nvPr/>
+        </p:nvSpPr>
+        <p:spPr>
+          <a:xfrm>
+            <a:off x="6134100" y="1562100"/>
+            <a:ext cx="5654040" cy="3074289"/>
+          </a:xfrm>
+          <a:prstGeom prst="rect">
+            <a:avLst/>
+          </a:prstGeom>
+          <a:solidFill>
+            <a:srgbClr val="D1D5DB"/>
+          </a:solidFill>
+          <a:ln>
+            <a:noFill/>
+          </a:ln>
+          <a:effectLst/>
+        </p:spPr>
+        <p:style>
+          <a:lnRef idx="1">
+            <a:schemeClr val="accent1"/>
+          </a:lnRef>
+          <a:fillRef idx="3">
+            <a:schemeClr val="accent1"/>
+          </a:fillRef>
+          <a:effectRef idx="2">
+            <a:schemeClr val="accent1"/>
+          </a:effectRef>
+          <a:fontRef idx="minor">
+            <a:schemeClr val="lt1"/>
+          </a:fontRef>
+        </p:style>
+        <p:txBody>
+          <a:bodyPr rtlCol="0" anchor="ctr" wrap="square"/>
+          <a:lstStyle/>
+          <a:p>
+            <a:pPr algn="ctr"/>
+            <a:r>
+              <a:rPr b="1" sz="2000">
+                <a:solidFill>
+                  <a:srgbClr val="9CA3AF"/>
+                </a:solidFill>
+                <a:latin typeface="Segoe UI"/>
+              </a:rPr>
+              <a:t>ADD IMAGE</a:t>
+            </a:r>
+          </a:p>
+        </p:txBody>
+      </p:sp>
+      <p:sp>
+        <p:nvSpPr>
+          <p:cNvPr id="10" name="Placeholder Caption"/>
+          <p:cNvSpPr txBox="1"/>
+          <p:nvPr/>
+        </p:nvSpPr>
+        <p:spPr>
+          <a:xfrm>
+            <a:off x="6172200" y="4674489"/>
+            <a:ext cx="5577840" cy="320040"/>
+          </a:xfrm>
+          <a:prstGeom prst="rect">
+            <a:avLst/>
+          </a:prstGeom>
+          <a:noFill/>
+        </p:spPr>
+        <p:txBody>
+          <a:bodyPr wrap="square">
+            <a:spAutoFit/>
+          </a:bodyPr>
+          <a:lstStyle/>
+          <a:p>
+            <a:pPr algn="ctr"/>
+            <a:r>
+              <a:rPr sz="1300" i="1">
+                <a:solidFill>
+                  <a:srgbClr val="4B5563"/>
+                </a:solidFill>
+                <a:latin typeface="Segoe UI"/>
+              </a:rPr>
+              <a:t>Suggested: the prober station this project began with</a:t>
+            </a:r>
+          </a:p>
+        </p:txBody>
+      </p:sp>
+      <p:pic>
+        <p:nvPicPr>
+          <p:cNvPr id="11" name="Logo Atomica" descr="atomica_transparent.png"/>
+          <p:cNvPicPr>
+            <a:picLocks noChangeAspect="1"/>
+          </p:cNvPicPr>
+          <p:nvPr/>
+        </p:nvPicPr>
+        <p:blipFill>
+          <a:blip r:embed="rId2"/>
+          <a:stretch>
+            <a:fillRect/>
+          </a:stretch>
+        </p:blipFill>
+        <p:spPr>
+          <a:xfrm>
+            <a:off x="9573706" y="342900"/>
+            <a:ext cx="1385455" cy="365760"/>
+          </a:xfrm>
+          <a:prstGeom prst="rect">
+            <a:avLst/>
+          </a:prstGeom>
+        </p:spPr>
+      </p:pic>
+      <p:pic>
+        <p:nvPicPr>
+          <p:cNvPr id="12" name="Logo OTTO" descr="otto_transparent.png"/>
+          <p:cNvPicPr>
+            <a:picLocks noChangeAspect="1"/>
+          </p:cNvPicPr>
+          <p:nvPr/>
+        </p:nvPicPr>
+        <p:blipFill>
+          <a:blip r:embed="rId3"/>
+          <a:stretch>
+            <a:fillRect/>
+          </a:stretch>
+        </p:blipFill>
+        <p:spPr>
+          <a:xfrm>
+            <a:off x="11142040" y="342900"/>
+            <a:ext cx="683895" cy="365760"/>
+          </a:xfrm>
+          <a:prstGeom prst="rect">
+            <a:avLst/>
+          </a:prstGeom>
+        </p:spPr>
+      </p:pic>
     </p:spTree>
   </p:cSld>
   <p:clrMapOvr>
@@ -5832,7 +6357,7 @@
                 </a:solidFill>
                 <a:latin typeface="Segoe UI"/>
               </a:rPr>
-              <a:t>What the GUI Does, In General</a:t>
+              <a:t>What It Does, In Short</a:t>
             </a:r>
           </a:p>
         </p:txBody>
@@ -5871,7 +6396,7 @@
                 </a:solidFill>
                 <a:latin typeface="Segoe UI"/>
               </a:rPr>
-              <a:t>In one sentence: it drives a robotic wafer prober and its lab instruments to automatically electrically test every chip on a silicon wafer, one at a time - then shows the results back live, on screen, as they happen.</a:t>
+              <a:t>In short: it runs a robotic wafer prober and its lab instruments to test every chip on a wafer automatically, and shows results live as it happens.</a:t>
             </a:r>
           </a:p>
           <a:p>
@@ -5903,7 +6428,7 @@
                 </a:solidFill>
                 <a:latin typeface="Segoe UI"/>
               </a:rPr>
-              <a:t>One application covers the whole job end to end: setting up what to test, running the test, watching it happen, and getting the data out the other side - instead of several disconnected tools stitched together.</a:t>
+              <a:t>One application handles the whole job — setup, testing, monitoring, and export — in one place.</a:t>
             </a:r>
           </a:p>
         </p:txBody>
@@ -6006,7 +6531,7 @@
                 </a:solidFill>
                 <a:latin typeface="Segoe UI"/>
               </a:rPr>
-              <a:t>Running a wafer live - position, pass/fail, and yield update in real time</a:t>
+              <a:t>Live view — position, pass/fail, and yield update in real time</a:t>
             </a:r>
           </a:p>
         </p:txBody>
@@ -6046,6 +6571,54 @@
           </a:p>
         </p:txBody>
       </p:sp>
+      <p:pic>
+        <p:nvPicPr>
+          <p:cNvPr id="12" name="Logo Atomica" descr="atomica_transparent.png"/>
+          <p:cNvPicPr>
+            <a:picLocks noChangeAspect="1"/>
+          </p:cNvPicPr>
+          <p:nvPr/>
+        </p:nvPicPr>
+        <p:blipFill>
+          <a:blip r:embed="rId3"/>
+          <a:stretch>
+            <a:fillRect/>
+          </a:stretch>
+        </p:blipFill>
+        <p:spPr>
+          <a:xfrm>
+            <a:off x="9573706" y="342900"/>
+            <a:ext cx="1385455" cy="365760"/>
+          </a:xfrm>
+          <a:prstGeom prst="rect">
+            <a:avLst/>
+          </a:prstGeom>
+        </p:spPr>
+      </p:pic>
+      <p:pic>
+        <p:nvPicPr>
+          <p:cNvPr id="13" name="Logo OTTO" descr="otto_transparent.png"/>
+          <p:cNvPicPr>
+            <a:picLocks noChangeAspect="1"/>
+          </p:cNvPicPr>
+          <p:nvPr/>
+        </p:nvPicPr>
+        <p:blipFill>
+          <a:blip r:embed="rId4"/>
+          <a:stretch>
+            <a:fillRect/>
+          </a:stretch>
+        </p:blipFill>
+        <p:spPr>
+          <a:xfrm>
+            <a:off x="11142040" y="342900"/>
+            <a:ext cx="683895" cy="365760"/>
+          </a:xfrm>
+          <a:prstGeom prst="rect">
+            <a:avLst/>
+          </a:prstGeom>
+        </p:spPr>
+      </p:pic>
     </p:spTree>
   </p:cSld>
   <p:clrMapOvr>
@@ -6300,7 +6873,7 @@
                 </a:solidFill>
                 <a:latin typeface="Segoe UI"/>
               </a:rPr>
-              <a:t>The lab runs two physically different prober systems - Accretech and Electroglas - from two different manufacturers, each with its own control software and its own age.</a:t>
+              <a:t>Two different prober brands, from two different eras — each running its own aging control software.</a:t>
             </a:r>
           </a:p>
           <a:p>
@@ -6332,7 +6905,7 @@
                 </a:solidFill>
                 <a:latin typeface="Segoe UI"/>
               </a:rPr>
-              <a:t>The Electroglas system's original control software was still tied to Windows XP - an operating system Microsoft stopped supporting years ago, with no security updates and shrinking hardware compatibility.</a:t>
+              <a:t>One depended on Windows XP, unsupported for years and a growing security risk.</a:t>
             </a:r>
           </a:p>
           <a:p>
@@ -6364,7 +6937,7 @@
                 </a:solidFill>
                 <a:latin typeface="Segoe UI"/>
               </a:rPr>
-              <a:t>The new application replaces both machines' aging, single-purpose control software with one modern program on modern Windows, with a single toggle to switch between them. Recipes, wafer maps, results, and exports all work the same way no matter which machine is underneath.</a:t>
+              <a:t>Now one modern program drives both, with a single switch between them — recipes, results, and exports work the same either way.</a:t>
             </a:r>
           </a:p>
         </p:txBody>
@@ -6467,7 +7040,7 @@
                 </a:solidFill>
                 <a:latin typeface="Segoe UI"/>
               </a:rPr>
-              <a:t>Same GUI, switched to drive the Electroglas system</a:t>
+              <a:t>The same program, now driving the Electroglas system</a:t>
             </a:r>
           </a:p>
         </p:txBody>
@@ -6507,6 +7080,54 @@
           </a:p>
         </p:txBody>
       </p:sp>
+      <p:pic>
+        <p:nvPicPr>
+          <p:cNvPr id="12" name="Logo Atomica" descr="atomica_transparent.png"/>
+          <p:cNvPicPr>
+            <a:picLocks noChangeAspect="1"/>
+          </p:cNvPicPr>
+          <p:nvPr/>
+        </p:nvPicPr>
+        <p:blipFill>
+          <a:blip r:embed="rId3"/>
+          <a:stretch>
+            <a:fillRect/>
+          </a:stretch>
+        </p:blipFill>
+        <p:spPr>
+          <a:xfrm>
+            <a:off x="9573706" y="342900"/>
+            <a:ext cx="1385455" cy="365760"/>
+          </a:xfrm>
+          <a:prstGeom prst="rect">
+            <a:avLst/>
+          </a:prstGeom>
+        </p:spPr>
+      </p:pic>
+      <p:pic>
+        <p:nvPicPr>
+          <p:cNvPr id="13" name="Logo OTTO" descr="otto_transparent.png"/>
+          <p:cNvPicPr>
+            <a:picLocks noChangeAspect="1"/>
+          </p:cNvPicPr>
+          <p:nvPr/>
+        </p:nvPicPr>
+        <p:blipFill>
+          <a:blip r:embed="rId4"/>
+          <a:stretch>
+            <a:fillRect/>
+          </a:stretch>
+        </p:blipFill>
+        <p:spPr>
+          <a:xfrm>
+            <a:off x="11142040" y="342900"/>
+            <a:ext cx="683895" cy="365760"/>
+          </a:xfrm>
+          <a:prstGeom prst="rect">
+            <a:avLst/>
+          </a:prstGeom>
+        </p:spPr>
+      </p:pic>
     </p:spTree>
   </p:cSld>
   <p:clrMapOvr>
@@ -6722,7 +7343,7 @@
                 </a:solidFill>
                 <a:latin typeface="Segoe UI"/>
               </a:rPr>
-              <a:t>From Hardcoded to Configurable</a:t>
+              <a:t>From Rigid to Flexible</a:t>
             </a:r>
           </a:p>
         </p:txBody>
@@ -6761,7 +7382,7 @@
                 </a:solidFill>
                 <a:latin typeface="Segoe UI"/>
               </a:rPr>
-              <a:t>The old Accretech/LabVIEW system baked its knowledge into the program itself - which pins meant what, which steps a test ran, how a wafer was laid out were effectively wired into the code. A new product often meant a new build, done by someone who knew LabVIEW.</a:t>
+              <a:t>The old system had its knowledge buried in code — changing anything meant a software rewrite, by someone who knew the old tool.</a:t>
             </a:r>
           </a:p>
           <a:p>
@@ -6793,7 +7414,7 @@
                 </a:solidFill>
                 <a:latin typeface="Segoe UI"/>
               </a:rPr>
-              <a:t>The new GUI turns all of that into ordinary, editable settings: probe card pinouts, test recipes, wafer layouts, and instrument choices are all built and changed directly on screen, by anyone on the team - no programming required.</a:t>
+              <a:t>Now, probe cards, test steps, and wafer layouts are all built and edited on screen — no programming required.</a:t>
             </a:r>
           </a:p>
           <a:p>
@@ -6825,7 +7446,7 @@
                 </a:solidFill>
                 <a:latin typeface="Segoe UI"/>
               </a:rPr>
-              <a:t>That single shift is what makes the system genuinely easy to use on a complicated piece of equipment: bringing up a brand-new product is now a configuration task, not a software project.</a:t>
+              <a:t>Bringing up a new product is now a configuration task, not a software project.</a:t>
             </a:r>
           </a:p>
         </p:txBody>
@@ -6928,7 +7549,7 @@
                 </a:solidFill>
                 <a:latin typeface="Segoe UI"/>
               </a:rPr>
-              <a:t>Building a test recipe by editing steps directly, no code involved</a:t>
+              <a:t>Building a test recipe on screen — no code required</a:t>
             </a:r>
           </a:p>
         </p:txBody>
@@ -6968,6 +7589,54 @@
           </a:p>
         </p:txBody>
       </p:sp>
+      <p:pic>
+        <p:nvPicPr>
+          <p:cNvPr id="12" name="Logo Atomica" descr="atomica_transparent.png"/>
+          <p:cNvPicPr>
+            <a:picLocks noChangeAspect="1"/>
+          </p:cNvPicPr>
+          <p:nvPr/>
+        </p:nvPicPr>
+        <p:blipFill>
+          <a:blip r:embed="rId3"/>
+          <a:stretch>
+            <a:fillRect/>
+          </a:stretch>
+        </p:blipFill>
+        <p:spPr>
+          <a:xfrm>
+            <a:off x="9573706" y="342900"/>
+            <a:ext cx="1385455" cy="365760"/>
+          </a:xfrm>
+          <a:prstGeom prst="rect">
+            <a:avLst/>
+          </a:prstGeom>
+        </p:spPr>
+      </p:pic>
+      <p:pic>
+        <p:nvPicPr>
+          <p:cNvPr id="13" name="Logo OTTO" descr="otto_transparent.png"/>
+          <p:cNvPicPr>
+            <a:picLocks noChangeAspect="1"/>
+          </p:cNvPicPr>
+          <p:nvPr/>
+        </p:nvPicPr>
+        <p:blipFill>
+          <a:blip r:embed="rId4"/>
+          <a:stretch>
+            <a:fillRect/>
+          </a:stretch>
+        </p:blipFill>
+        <p:spPr>
+          <a:xfrm>
+            <a:off x="11142040" y="342900"/>
+            <a:ext cx="683895" cy="365760"/>
+          </a:xfrm>
+          <a:prstGeom prst="rect">
+            <a:avLst/>
+          </a:prstGeom>
+        </p:spPr>
+      </p:pic>
     </p:spTree>
   </p:cSld>
   <p:clrMapOvr>
@@ -7148,7 +7817,7 @@
                 </a:solidFill>
                 <a:latin typeface="Segoe UI"/>
               </a:rPr>
-              <a:t>HOW IT TALKS TO HARDWARE</a:t>
+              <a:t>CONNECTING THE LAB</a:t>
             </a:r>
           </a:p>
         </p:txBody>
@@ -7183,7 +7852,7 @@
                 </a:solidFill>
                 <a:latin typeface="Segoe UI"/>
               </a:rPr>
-              <a:t>A Common Language for Old &amp; New Instruments</a:t>
+              <a:t>One Language for Every Instrument</a:t>
             </a:r>
           </a:p>
         </p:txBody>
@@ -7196,8 +7865,8 @@
         </p:nvSpPr>
         <p:spPr>
           <a:xfrm>
-            <a:off x="548640" y="1417320"/>
-            <a:ext cx="11064240" cy="4206240"/>
+            <a:off x="548640" y="1280160"/>
+            <a:ext cx="5486400" cy="4206240"/>
           </a:xfrm>
           <a:prstGeom prst="rect">
             <a:avLst/>
@@ -7222,7 +7891,7 @@
                 </a:solidFill>
                 <a:latin typeface="Segoe UI"/>
               </a:rPr>
-              <a:t>▸  GPIB is a decades-old cable standard</a:t>
+              <a:t>▸  Every instrument speaks a shared, industry-standard language</a:t>
             </a:r>
             <a:r>
               <a:rPr sz="1700" b="0">
@@ -7231,7 +7900,7 @@
                 </a:solidFill>
                 <a:latin typeface="Segoe UI"/>
               </a:rPr>
-              <a:t>  —  still the industry norm for connecting lab instruments (source-measure units, multimeters, switch matrices) to a controlling computer.</a:t>
+              <a:t>  —  regardless of age or manufacturer.</a:t>
             </a:r>
           </a:p>
           <a:p>
@@ -7247,7 +7916,7 @@
                 </a:solidFill>
                 <a:latin typeface="Segoe UI"/>
               </a:rPr>
-              <a:t>▸  Every instrument on the bench - old or new, from any manufacturer - speaks the same basic protocol over it.</a:t>
+              <a:t>▸  The software translates plain requests  —  like “apply 5 volts” or “read the current” — into whatever that instrument needs.</a:t>
             </a:r>
           </a:p>
           <a:p>
@@ -7263,23 +7932,7 @@
                 </a:solidFill>
                 <a:latin typeface="Segoe UI"/>
               </a:rPr>
-              <a:t>▸  The software has one "driver" per instrument model that translates a plain request ("apply 5 volts," "read the current") into the exact commands that model expects.</a:t>
-            </a:r>
-          </a:p>
-          <a:p>
-            <a:pPr>
-              <a:spcAft>
-                <a:spcPts val="1600"/>
-              </a:spcAft>
-            </a:pPr>
-            <a:r>
-              <a:rPr sz="1700" b="1">
-                <a:solidFill>
-                  <a:srgbClr val="111827"/>
-                </a:solidFill>
-                <a:latin typeface="Segoe UI"/>
-              </a:rPr>
-              <a:t>▸  Because that translation layer is isolated, swapping in a newer instrument - or adding a brand-new one - doesn't require touching the rest of the program.</a:t>
+              <a:t>▸  New equipment plugs in without reworking the rest of the program  —  keeping the system future-proof as the bench evolves.</a:t>
             </a:r>
           </a:p>
         </p:txBody>
@@ -7319,6 +7972,142 @@
           </a:p>
         </p:txBody>
       </p:sp>
+      <p:sp>
+        <p:nvSpPr>
+          <p:cNvPr id="9" name="Placeholder Frame"/>
+          <p:cNvSpPr/>
+          <p:nvPr/>
+        </p:nvSpPr>
+        <p:spPr>
+          <a:xfrm>
+            <a:off x="6134100" y="1562100"/>
+            <a:ext cx="5654040" cy="3074289"/>
+          </a:xfrm>
+          <a:prstGeom prst="rect">
+            <a:avLst/>
+          </a:prstGeom>
+          <a:solidFill>
+            <a:srgbClr val="D1D5DB"/>
+          </a:solidFill>
+          <a:ln>
+            <a:noFill/>
+          </a:ln>
+          <a:effectLst/>
+        </p:spPr>
+        <p:style>
+          <a:lnRef idx="1">
+            <a:schemeClr val="accent1"/>
+          </a:lnRef>
+          <a:fillRef idx="3">
+            <a:schemeClr val="accent1"/>
+          </a:fillRef>
+          <a:effectRef idx="2">
+            <a:schemeClr val="accent1"/>
+          </a:effectRef>
+          <a:fontRef idx="minor">
+            <a:schemeClr val="lt1"/>
+          </a:fontRef>
+        </p:style>
+        <p:txBody>
+          <a:bodyPr rtlCol="0" anchor="ctr" wrap="square"/>
+          <a:lstStyle/>
+          <a:p>
+            <a:pPr algn="ctr"/>
+            <a:r>
+              <a:rPr b="1" sz="2000">
+                <a:solidFill>
+                  <a:srgbClr val="9CA3AF"/>
+                </a:solidFill>
+                <a:latin typeface="Segoe UI"/>
+              </a:rPr>
+              <a:t>ADD IMAGE</a:t>
+            </a:r>
+          </a:p>
+        </p:txBody>
+      </p:sp>
+      <p:sp>
+        <p:nvSpPr>
+          <p:cNvPr id="10" name="Placeholder Caption"/>
+          <p:cNvSpPr txBox="1"/>
+          <p:nvPr/>
+        </p:nvSpPr>
+        <p:spPr>
+          <a:xfrm>
+            <a:off x="6172200" y="4674489"/>
+            <a:ext cx="5577840" cy="320040"/>
+          </a:xfrm>
+          <a:prstGeom prst="rect">
+            <a:avLst/>
+          </a:prstGeom>
+          <a:noFill/>
+        </p:spPr>
+        <p:txBody>
+          <a:bodyPr wrap="square">
+            <a:spAutoFit/>
+          </a:bodyPr>
+          <a:lstStyle/>
+          <a:p>
+            <a:pPr algn="ctr"/>
+            <a:r>
+              <a:rPr sz="1300" i="1">
+                <a:solidFill>
+                  <a:srgbClr val="4B5563"/>
+                </a:solidFill>
+                <a:latin typeface="Segoe UI"/>
+              </a:rPr>
+              <a:t>Suggested: instruments connected on the bench</a:t>
+            </a:r>
+          </a:p>
+        </p:txBody>
+      </p:sp>
+      <p:pic>
+        <p:nvPicPr>
+          <p:cNvPr id="11" name="Logo Atomica" descr="atomica_transparent.png"/>
+          <p:cNvPicPr>
+            <a:picLocks noChangeAspect="1"/>
+          </p:cNvPicPr>
+          <p:nvPr/>
+        </p:nvPicPr>
+        <p:blipFill>
+          <a:blip r:embed="rId2"/>
+          <a:stretch>
+            <a:fillRect/>
+          </a:stretch>
+        </p:blipFill>
+        <p:spPr>
+          <a:xfrm>
+            <a:off x="9573706" y="342900"/>
+            <a:ext cx="1385455" cy="365760"/>
+          </a:xfrm>
+          <a:prstGeom prst="rect">
+            <a:avLst/>
+          </a:prstGeom>
+        </p:spPr>
+      </p:pic>
+      <p:pic>
+        <p:nvPicPr>
+          <p:cNvPr id="12" name="Logo OTTO" descr="otto_transparent.png"/>
+          <p:cNvPicPr>
+            <a:picLocks noChangeAspect="1"/>
+          </p:cNvPicPr>
+          <p:nvPr/>
+        </p:nvPicPr>
+        <p:blipFill>
+          <a:blip r:embed="rId3"/>
+          <a:stretch>
+            <a:fillRect/>
+          </a:stretch>
+        </p:blipFill>
+        <p:spPr>
+          <a:xfrm>
+            <a:off x="11142040" y="342900"/>
+            <a:ext cx="683895" cy="365760"/>
+          </a:xfrm>
+          <a:prstGeom prst="rect">
+            <a:avLst/>
+          </a:prstGeom>
+        </p:spPr>
+      </p:pic>
     </p:spTree>
   </p:cSld>
   <p:clrMapOvr>
@@ -7534,7 +8323,7 @@
                 </a:solidFill>
                 <a:latin typeface="Segoe UI"/>
               </a:rPr>
-              <a:t>The Wafer Map: The Real Engine Underneath</a:t>
+              <a:t>The Wafer Map: The Foundation Underneath</a:t>
             </a:r>
           </a:p>
         </p:txBody>
@@ -7573,7 +8362,7 @@
                 </a:solidFill>
                 <a:latin typeface="Segoe UI"/>
               </a:rPr>
-              <a:t>Before anything can be tested, the software needs to know the exact layout of the wafer: how many chips ("dies"), how they're arranged in rows and columns, and which ones exist near the wafer's rounded edge.</a:t>
+              <a:t>Before testing starts, the software needs to know the wafer's layout — how many chips, and exactly where.</a:t>
             </a:r>
           </a:p>
           <a:p>
@@ -7605,7 +8394,7 @@
                 </a:solidFill>
                 <a:latin typeface="Segoe UI"/>
               </a:rPr>
-              <a:t>That map can be built by hand, imported from a design file, or pulled straight from the prober's own hardware - and once it exists, it becomes the shared foundation for everything else: the test recipe walks it, the live run screen tracks position on it, and the results paint pass/fail directly onto it.</a:t>
+              <a:t>That map becomes the shared foundation for everything else: the recipe follows it, the live view tracks it, and results are painted directly onto it.</a:t>
             </a:r>
           </a:p>
           <a:p>
@@ -7637,7 +8426,7 @@
                 </a:solidFill>
                 <a:latin typeface="Segoe UI"/>
               </a:rPr>
-              <a:t>It isn't just a picture of the wafer - it's a general "grid of positions, each with its own state" engine that the rest of the program is built around.</a:t>
+              <a:t>It's a reusable foundation, not just a picture of the wafer.</a:t>
             </a:r>
           </a:p>
         </p:txBody>
@@ -7780,6 +8569,54 @@
           </a:p>
         </p:txBody>
       </p:sp>
+      <p:pic>
+        <p:nvPicPr>
+          <p:cNvPr id="12" name="Logo Atomica" descr="atomica_transparent.png"/>
+          <p:cNvPicPr>
+            <a:picLocks noChangeAspect="1"/>
+          </p:cNvPicPr>
+          <p:nvPr/>
+        </p:nvPicPr>
+        <p:blipFill>
+          <a:blip r:embed="rId3"/>
+          <a:stretch>
+            <a:fillRect/>
+          </a:stretch>
+        </p:blipFill>
+        <p:spPr>
+          <a:xfrm>
+            <a:off x="9573706" y="342900"/>
+            <a:ext cx="1385455" cy="365760"/>
+          </a:xfrm>
+          <a:prstGeom prst="rect">
+            <a:avLst/>
+          </a:prstGeom>
+        </p:spPr>
+      </p:pic>
+      <p:pic>
+        <p:nvPicPr>
+          <p:cNvPr id="13" name="Logo OTTO" descr="otto_transparent.png"/>
+          <p:cNvPicPr>
+            <a:picLocks noChangeAspect="1"/>
+          </p:cNvPicPr>
+          <p:nvPr/>
+        </p:nvPicPr>
+        <p:blipFill>
+          <a:blip r:embed="rId4"/>
+          <a:stretch>
+            <a:fillRect/>
+          </a:stretch>
+        </p:blipFill>
+        <p:spPr>
+          <a:xfrm>
+            <a:off x="11142040" y="342900"/>
+            <a:ext cx="683895" cy="365760"/>
+          </a:xfrm>
+          <a:prstGeom prst="rect">
+            <a:avLst/>
+          </a:prstGeom>
+        </p:spPr>
+      </p:pic>
     </p:spTree>
   </p:cSld>
   <p:clrMapOvr>
@@ -8008,8 +8845,8 @@
         </p:nvSpPr>
         <p:spPr>
           <a:xfrm>
-            <a:off x="548640" y="1371600"/>
-            <a:ext cx="11064240" cy="685800"/>
+            <a:off x="548640" y="1280160"/>
+            <a:ext cx="5486400" cy="685800"/>
           </a:xfrm>
           <a:prstGeom prst="rect">
             <a:avLst/>
@@ -8030,7 +8867,7 @@
                 </a:solidFill>
                 <a:latin typeface="Segoe UI"/>
               </a:rPr>
-              <a:t>Of everything in this system, the wafer map engine is the most valuable piece to carry elsewhere - because "a grid of positions that each get visited and get a result" shows up far beyond wafer probing.</a:t>
+              <a:t>This wafer-map engine is the single most valuable piece to carry into future projects.</a:t>
             </a:r>
           </a:p>
         </p:txBody>
@@ -8043,8 +8880,8 @@
         </p:nvSpPr>
         <p:spPr>
           <a:xfrm>
-            <a:off x="548640" y="2331720"/>
-            <a:ext cx="11064240" cy="3840480"/>
+            <a:off x="548640" y="2057400"/>
+            <a:ext cx="5486400" cy="3429000"/>
           </a:xfrm>
           <a:prstGeom prst="rect">
             <a:avLst/>
@@ -8069,7 +8906,7 @@
                 </a:solidFill>
                 <a:latin typeface="Segoe UI"/>
               </a:rPr>
-              <a:t>▸  Any equipment that steps through a fixed layout of positions</a:t>
+              <a:t>▸  Works for any equipment stepping through fixed positions</a:t>
             </a:r>
             <a:r>
               <a:rPr sz="1650" b="0">
@@ -8078,7 +8915,7 @@
                 </a:solidFill>
                 <a:latin typeface="Segoe UI"/>
               </a:rPr>
-              <a:t>  —  a different prober, a socket board, a tray of parts - can reuse the exact same map, without touching how it's drawn or tracked.</a:t>
+              <a:t>  —  not just wafers.</a:t>
             </a:r>
           </a:p>
           <a:p>
@@ -8094,7 +8931,7 @@
                 </a:solidFill>
                 <a:latin typeface="Segoe UI"/>
               </a:rPr>
-              <a:t>▸  The pass/fail-per-position coloring, the click-to-inspect detail, and the "skip/align" handling for irregular edges all come for free</a:t>
+              <a:t>▸  Pass/fail visuals and inspection tools come built in</a:t>
             </a:r>
             <a:r>
               <a:rPr sz="1650" b="0">
@@ -8103,7 +8940,7 @@
                 </a:solidFill>
                 <a:latin typeface="Segoe UI"/>
               </a:rPr>
-              <a:t>  —  they were built generically, not wafer-specific.</a:t>
+              <a:t>  —  for free, on day one.</a:t>
             </a:r>
           </a:p>
           <a:p>
@@ -8119,7 +8956,7 @@
                 </a:solidFill>
                 <a:latin typeface="Segoe UI"/>
               </a:rPr>
-              <a:t>▸  Swapping in a new layout is a data change, not a redesign</a:t>
+              <a:t>▸  A new layout is a data change</a:t>
             </a:r>
             <a:r>
               <a:rPr sz="1650" b="0">
@@ -8128,7 +8965,7 @@
                 </a:solidFill>
                 <a:latin typeface="Segoe UI"/>
               </a:rPr>
-              <a:t>  —  the same map component happily describes a round wafer, a rectangular tray, or an arbitrary custom grid.</a:t>
+              <a:t>  —  not a redesign.</a:t>
             </a:r>
           </a:p>
         </p:txBody>
@@ -8168,6 +9005,142 @@
           </a:p>
         </p:txBody>
       </p:sp>
+      <p:sp>
+        <p:nvSpPr>
+          <p:cNvPr id="10" name="Placeholder Frame"/>
+          <p:cNvSpPr/>
+          <p:nvPr/>
+        </p:nvSpPr>
+        <p:spPr>
+          <a:xfrm>
+            <a:off x="6134100" y="1562100"/>
+            <a:ext cx="5654040" cy="3074289"/>
+          </a:xfrm>
+          <a:prstGeom prst="rect">
+            <a:avLst/>
+          </a:prstGeom>
+          <a:solidFill>
+            <a:srgbClr val="D1D5DB"/>
+          </a:solidFill>
+          <a:ln>
+            <a:noFill/>
+          </a:ln>
+          <a:effectLst/>
+        </p:spPr>
+        <p:style>
+          <a:lnRef idx="1">
+            <a:schemeClr val="accent1"/>
+          </a:lnRef>
+          <a:fillRef idx="3">
+            <a:schemeClr val="accent1"/>
+          </a:fillRef>
+          <a:effectRef idx="2">
+            <a:schemeClr val="accent1"/>
+          </a:effectRef>
+          <a:fontRef idx="minor">
+            <a:schemeClr val="lt1"/>
+          </a:fontRef>
+        </p:style>
+        <p:txBody>
+          <a:bodyPr rtlCol="0" anchor="ctr" wrap="square"/>
+          <a:lstStyle/>
+          <a:p>
+            <a:pPr algn="ctr"/>
+            <a:r>
+              <a:rPr b="1" sz="2000">
+                <a:solidFill>
+                  <a:srgbClr val="9CA3AF"/>
+                </a:solidFill>
+                <a:latin typeface="Segoe UI"/>
+              </a:rPr>
+              <a:t>ADD IMAGE</a:t>
+            </a:r>
+          </a:p>
+        </p:txBody>
+      </p:sp>
+      <p:sp>
+        <p:nvSpPr>
+          <p:cNvPr id="11" name="Placeholder Caption"/>
+          <p:cNvSpPr txBox="1"/>
+          <p:nvPr/>
+        </p:nvSpPr>
+        <p:spPr>
+          <a:xfrm>
+            <a:off x="6172200" y="4674489"/>
+            <a:ext cx="5577840" cy="320040"/>
+          </a:xfrm>
+          <a:prstGeom prst="rect">
+            <a:avLst/>
+          </a:prstGeom>
+          <a:noFill/>
+        </p:spPr>
+        <p:txBody>
+          <a:bodyPr wrap="square">
+            <a:spAutoFit/>
+          </a:bodyPr>
+          <a:lstStyle/>
+          <a:p>
+            <a:pPr algn="ctr"/>
+            <a:r>
+              <a:rPr sz="1300" i="1">
+                <a:solidFill>
+                  <a:srgbClr val="4B5563"/>
+                </a:solidFill>
+                <a:latin typeface="Segoe UI"/>
+              </a:rPr>
+              <a:t>Suggested: the same map applied to a different layout</a:t>
+            </a:r>
+          </a:p>
+        </p:txBody>
+      </p:sp>
+      <p:pic>
+        <p:nvPicPr>
+          <p:cNvPr id="12" name="Logo Atomica" descr="atomica_transparent.png"/>
+          <p:cNvPicPr>
+            <a:picLocks noChangeAspect="1"/>
+          </p:cNvPicPr>
+          <p:nvPr/>
+        </p:nvPicPr>
+        <p:blipFill>
+          <a:blip r:embed="rId2"/>
+          <a:stretch>
+            <a:fillRect/>
+          </a:stretch>
+        </p:blipFill>
+        <p:spPr>
+          <a:xfrm>
+            <a:off x="9573706" y="342900"/>
+            <a:ext cx="1385455" cy="365760"/>
+          </a:xfrm>
+          <a:prstGeom prst="rect">
+            <a:avLst/>
+          </a:prstGeom>
+        </p:spPr>
+      </p:pic>
+      <p:pic>
+        <p:nvPicPr>
+          <p:cNvPr id="13" name="Logo OTTO" descr="otto_transparent.png"/>
+          <p:cNvPicPr>
+            <a:picLocks noChangeAspect="1"/>
+          </p:cNvPicPr>
+          <p:nvPr/>
+        </p:nvPicPr>
+        <p:blipFill>
+          <a:blip r:embed="rId3"/>
+          <a:stretch>
+            <a:fillRect/>
+          </a:stretch>
+        </p:blipFill>
+        <p:spPr>
+          <a:xfrm>
+            <a:off x="11142040" y="342900"/>
+            <a:ext cx="683895" cy="365760"/>
+          </a:xfrm>
+          <a:prstGeom prst="rect">
+            <a:avLst/>
+          </a:prstGeom>
+        </p:spPr>
+      </p:pic>
     </p:spTree>
   </p:cSld>
   <p:clrMapOvr>
@@ -8422,7 +9395,7 @@
                 </a:solidFill>
                 <a:latin typeface="Segoe UI"/>
               </a:rPr>
-              <a:t>As each die is tested, its pass/fail status colors in on a wafer-shaped map, so patterns - a bad edge, a failing cluster - jump out visually instead of hiding in a spreadsheet.</a:t>
+              <a:t>As each chip is tested, results color in live — so patterns like a bad edge or failing cluster jump out immediately.</a:t>
             </a:r>
           </a:p>
           <a:p>
@@ -8454,7 +9427,7 @@
                 </a:solidFill>
                 <a:latin typeface="Segoe UI"/>
               </a:rPr>
-              <a:t>Every individual measurement is kept too, and can be exported in whatever format the next step downstream - a database, another team's tool - expects.</a:t>
+              <a:t>Every measurement is saved and can be exported in whatever format the next step needs.</a:t>
             </a:r>
           </a:p>
         </p:txBody>
@@ -8557,7 +9530,7 @@
                 </a:solidFill>
                 <a:latin typeface="Segoe UI"/>
               </a:rPr>
-              <a:t>Pass/fail wafer map and data export, built on the same map engine</a:t>
+              <a:t>Pass/fail map and data export, in one view</a:t>
             </a:r>
           </a:p>
         </p:txBody>
@@ -8597,6 +9570,54 @@
           </a:p>
         </p:txBody>
       </p:sp>
+      <p:pic>
+        <p:nvPicPr>
+          <p:cNvPr id="12" name="Logo Atomica" descr="atomica_transparent.png"/>
+          <p:cNvPicPr>
+            <a:picLocks noChangeAspect="1"/>
+          </p:cNvPicPr>
+          <p:nvPr/>
+        </p:nvPicPr>
+        <p:blipFill>
+          <a:blip r:embed="rId3"/>
+          <a:stretch>
+            <a:fillRect/>
+          </a:stretch>
+        </p:blipFill>
+        <p:spPr>
+          <a:xfrm>
+            <a:off x="9573706" y="342900"/>
+            <a:ext cx="1385455" cy="365760"/>
+          </a:xfrm>
+          <a:prstGeom prst="rect">
+            <a:avLst/>
+          </a:prstGeom>
+        </p:spPr>
+      </p:pic>
+      <p:pic>
+        <p:nvPicPr>
+          <p:cNvPr id="13" name="Logo OTTO" descr="otto_transparent.png"/>
+          <p:cNvPicPr>
+            <a:picLocks noChangeAspect="1"/>
+          </p:cNvPicPr>
+          <p:nvPr/>
+        </p:nvPicPr>
+        <p:blipFill>
+          <a:blip r:embed="rId4"/>
+          <a:stretch>
+            <a:fillRect/>
+          </a:stretch>
+        </p:blipFill>
+        <p:spPr>
+          <a:xfrm>
+            <a:off x="11142040" y="342900"/>
+            <a:ext cx="683895" cy="365760"/>
+          </a:xfrm>
+          <a:prstGeom prst="rect">
+            <a:avLst/>
+          </a:prstGeom>
+        </p:spPr>
+      </p:pic>
     </p:spTree>
   </p:cSld>
   <p:clrMapOvr>
